--- a/02-精益培训/02-培训材料/05-WCM培训课件.pptx
+++ b/02-精益培训/02-培训材料/05-WCM培训课件.pptx
@@ -3502,7 +3502,7 @@
                 <a:latin typeface="SimSun"/>
                 <a:rFonts a:latin="SimSun" a:ea="SimSun"/>
               </a:rPr>
-              <a:t>紧固件行业重点：</a:t>
+              <a:t>制造业重点：</a:t>
             </a:r>
           </a:p>
           <a:p>
@@ -4148,7 +4148,7 @@
                 <a:latin typeface="SimSun"/>
                 <a:rFonts a:latin="SimSun" a:ea="SimSun"/>
               </a:rPr>
-              <a:t>紧固件行业成本重点：</a:t>
+              <a:t>制造业成本重点：</a:t>
             </a:r>
           </a:p>
           <a:p>
@@ -6154,7 +6154,7 @@
                 <a:latin typeface="SimHei"/>
                 <a:rFonts a:latin="SimHei" a:ea="SimHei"/>
               </a:rPr>
-              <a:t>紧固件行业应用案例</a:t>
+              <a:t>制造工序应用案例</a:t>
             </a:r>
           </a:p>
         </p:txBody>
@@ -6194,7 +6194,7 @@
                 <a:latin typeface="SimSun"/>
                 <a:rFonts a:latin="SimSun" a:ea="SimSun"/>
               </a:rPr>
-              <a:t>WCM 在紧固件行业的全面应用：</a:t>
+              <a:t>WCM 在制造业的全面应用：</a:t>
             </a:r>
           </a:p>
           <a:p>
@@ -6228,7 +6228,7 @@
                 <a:latin typeface="SimSun"/>
                 <a:rFonts a:latin="SimSun" a:ea="SimSun"/>
               </a:rPr>
-              <a:t>AM 自主维护：冷镦机、搓丝机、热处理炉日常点检</a:t>
+              <a:t>AM 自主维护：机加工设备、精加工设备、热处理炉日常点检</a:t>
             </a:r>
           </a:p>
           <a:p>
@@ -6262,7 +6262,7 @@
                 <a:latin typeface="SimSun"/>
                 <a:rFonts a:latin="SimSun" a:ea="SimSun"/>
               </a:rPr>
-              <a:t>QM 质量管理：螺纹通止规、SPC控制图、Cpk提升</a:t>
+              <a:t>QM 质量管理：量规、SPC控制图、Cpk提升</a:t>
             </a:r>
           </a:p>
           <a:p>
@@ -6279,7 +6279,7 @@
                 <a:latin typeface="SimSun"/>
                 <a:rFonts a:latin="SimSun" a:ea="SimSun"/>
               </a:rPr>
-              <a:t>DM 交期管理：从冷镦到成品的全流程前置时间压缩</a:t>
+              <a:t>DM 交期管理：从机加工到成品的全流程前置时间压缩</a:t>
             </a:r>
           </a:p>
           <a:p>
@@ -6619,7 +6619,7 @@
                 <a:latin typeface="SimSun"/>
                 <a:rFonts a:latin="SimSun" a:ea="SimSun"/>
               </a:rPr>
-              <a:t>4. 紧固件行业全面适用，每个支柱都有具体应用场景</a:t>
+              <a:t>4. 制造业全面适用，每个支柱都有具体应用场景</a:t>
             </a:r>
           </a:p>
           <a:p>
